--- a/public/fun/pack/pptx/family/가족소개_35_반려동물과함께_밤줍던산.pptx
+++ b/public/fun/pack/pptx/family/가족소개_35_반려동물과함께_밤줍던산.pptx
@@ -3286,6 +3286,14 @@
 <file path=ppt/slides/slide1.xml><?xml version="1.0" encoding="utf-8"?>
 <p:sld xmlns:a="http://schemas.openxmlformats.org/drawingml/2006/main" xmlns:p="http://schemas.openxmlformats.org/presentationml/2006/main" xmlns:r="http://schemas.openxmlformats.org/officeDocument/2006/relationships">
   <p:cSld>
+    <p:bg>
+      <p:bgPr>
+        <a:solidFill>
+          <a:srgbClr val="FBF4EC"/>
+        </a:solidFill>
+        <a:effectLst/>
+      </p:bgPr>
+    </p:bg>
     <p:spTree>
       <p:nvGrpSpPr>
         <p:cNvPr id="1" name=""/>
@@ -3293,30 +3301,119 @@
         <p:nvPr/>
       </p:nvGrpSpPr>
       <p:grpSpPr/>
-      <p:pic>
-        <p:nvPicPr>
-          <p:cNvPr id="3" name="표지 그림" descr="family-35.jpg"/>
-          <p:cNvPicPr>
-            <a:picLocks noChangeAspect="1"/>
-          </p:cNvPicPr>
+      <p:sp>
+        <p:nvSpPr>
+          <p:cNvPr id="3" name="사진 자리"/>
+          <p:cNvSpPr/>
           <p:nvPr/>
-        </p:nvPicPr>
-        <p:blipFill>
-          <a:blip r:embed="rId2"/>
-          <a:stretch>
-            <a:fillRect/>
-          </a:stretch>
-        </p:blipFill>
-        <p:spPr>
-          <a:xfrm>
-            <a:off x="0" y="0"/>
-            <a:ext cx="12191695" cy="6858000"/>
+        </p:nvSpPr>
+        <p:spPr>
+          <a:xfrm>
+            <a:off x="7558851" y="685800"/>
+            <a:ext cx="3169840" cy="5486400"/>
+          </a:xfrm>
+          <a:prstGeom prst="round2SameRect">
+            <a:avLst>
+              <a:gd name="adj1" fmla="val 50000"/>
+              <a:gd name="adj2" fmla="val 0"/>
+            </a:avLst>
+          </a:prstGeom>
+          <a:solidFill>
+            <a:srgbClr val="EBCCAD"/>
+          </a:solidFill>
+          <a:ln>
+            <a:noFill/>
+          </a:ln>
+        </p:spPr>
+        <p:txBody>
+          <a:bodyPr rtlCol="0" anchor="ctr" wrap="square" lIns="54864" rIns="54864" tIns="27432" bIns="27432">
+            <a:noAutofit/>
+          </a:bodyPr>
+          <a:lstStyle/>
+          <a:p>
+            <a:pPr algn="ctr">
+              <a:lnSpc>
+                <a:spcPct val="100000"/>
+              </a:lnSpc>
+            </a:pPr>
+            <a:r>
+              <a:rPr sz="1400" b="0" i="0">
+                <a:solidFill>
+                  <a:srgbClr val="493827"/>
+                </a:solidFill>
+              </a:rPr>
+              <a:t>사진을 넣어 주세요</a:t>
+            </a:r>
+          </a:p>
+        </p:txBody>
+      </p:sp>
+      <p:sp>
+        <p:nvSpPr>
+          <p:cNvPr id="4" name="장식"/>
+          <p:cNvSpPr/>
+          <p:nvPr/>
+        </p:nvSpPr>
+        <p:spPr>
+          <a:xfrm>
+            <a:off x="6827349" y="4251960"/>
+            <a:ext cx="1005840" cy="1005840"/>
+          </a:xfrm>
+          <a:prstGeom prst="ellipse">
+            <a:avLst/>
+          </a:prstGeom>
+          <a:solidFill>
+            <a:srgbClr val="EBCCAD"/>
+          </a:solidFill>
+          <a:ln>
+            <a:noFill/>
+          </a:ln>
+        </p:spPr>
+        <p:txBody>
+          <a:bodyPr rtlCol="0" anchor="ctr"/>
+          <a:lstStyle/>
+          <a:p>
+            <a:pPr algn="ctr"/>
+          </a:p>
+        </p:txBody>
+      </p:sp>
+      <p:sp>
+        <p:nvSpPr>
+          <p:cNvPr id="5" name="라벨"/>
+          <p:cNvSpPr txBox="1"/>
+          <p:nvPr/>
+        </p:nvSpPr>
+        <p:spPr>
+          <a:xfrm>
+            <a:off x="822960" y="2148840"/>
+            <a:ext cx="5608179" cy="274320"/>
           </a:xfrm>
           <a:prstGeom prst="rect">
             <a:avLst/>
           </a:prstGeom>
-        </p:spPr>
-      </p:pic>
+          <a:noFill/>
+        </p:spPr>
+        <p:txBody>
+          <a:bodyPr wrap="square" lIns="54864" rIns="54864" tIns="27432" bIns="27432" anchor="t">
+            <a:noAutofit/>
+          </a:bodyPr>
+          <a:lstStyle/>
+          <a:p>
+            <a:pPr algn="l">
+              <a:lnSpc>
+                <a:spcPct val="115000"/>
+              </a:lnSpc>
+            </a:pPr>
+            <a:r>
+              <a:rPr sz="1000" b="1" i="0" spc="250">
+                <a:solidFill>
+                  <a:srgbClr val="26231F"/>
+                </a:solidFill>
+              </a:rPr>
+              <a:t>FAMILY ALBUM</a:t>
+            </a:r>
+          </a:p>
+        </p:txBody>
+      </p:sp>
       <p:sp>
         <p:nvSpPr>
           <p:cNvPr id="2" name="Title 1"/>
@@ -3329,8 +3426,8 @@
         </p:nvSpPr>
         <p:spPr>
           <a:xfrm>
-            <a:off x="853418" y="2057400"/>
-            <a:ext cx="6095847" cy="1554480"/>
+            <a:off x="822960" y="2606040"/>
+            <a:ext cx="5608179" cy="1188720"/>
           </a:xfrm>
         </p:spPr>
         <p:txBody>
@@ -3345,9 +3442,9 @@
               </a:lnSpc>
             </a:pPr>
             <a:r>
-              <a:rPr sz="3600" b="1" i="0">
-                <a:solidFill>
-                  <a:srgbClr val="3A2918"/>
+              <a:rPr sz="4000" b="1" i="0">
+                <a:solidFill>
+                  <a:srgbClr val="26231F"/>
                 </a:solidFill>
               </a:rPr>
               <a:t>우리 가족을 소개합니다</a:t>
@@ -3357,14 +3454,14 @@
       </p:sp>
       <p:sp>
         <p:nvSpPr>
-          <p:cNvPr id="4" name="한 줄 문구"/>
+          <p:cNvPr id="6" name="한 줄 문구"/>
           <p:cNvSpPr txBox="1"/>
           <p:nvPr/>
         </p:nvSpPr>
         <p:spPr>
           <a:xfrm>
-            <a:off x="853418" y="3749039"/>
-            <a:ext cx="6095847" cy="822960"/>
+            <a:off x="822960" y="3886200"/>
+            <a:ext cx="5608179" cy="822960"/>
           </a:xfrm>
           <a:prstGeom prst="rect">
             <a:avLst/>
@@ -3383,9 +3480,9 @@
               </a:lnSpc>
             </a:pPr>
             <a:r>
-              <a:rPr sz="1700" b="0" i="1">
-                <a:solidFill>
-                  <a:srgbClr val="3A2918"/>
+              <a:rPr sz="1700" b="0" i="0">
+                <a:solidFill>
+                  <a:srgbClr val="26231F"/>
                 </a:solidFill>
               </a:rPr>
               <a:t>밤 줍는 옆에서 낙엽 물고 온 날</a:t>
@@ -3395,14 +3492,14 @@
       </p:sp>
       <p:sp>
         <p:nvSpPr>
-          <p:cNvPr id="5" name="안내 문구"/>
+          <p:cNvPr id="7" name="안내 문구"/>
           <p:cNvSpPr txBox="1"/>
           <p:nvPr/>
         </p:nvSpPr>
         <p:spPr>
           <a:xfrm>
-            <a:off x="853418" y="4617720"/>
-            <a:ext cx="6095847" cy="914400"/>
+            <a:off x="822960" y="4754880"/>
+            <a:ext cx="5608179" cy="914400"/>
           </a:xfrm>
           <a:prstGeom prst="rect">
             <a:avLst/>
@@ -3423,10 +3520,10 @@
             <a:r>
               <a:rPr sz="1400" b="0" i="0">
                 <a:solidFill>
-                  <a:srgbClr val="666666"/>
+                  <a:srgbClr val="26231F"/>
                 </a:solidFill>
               </a:rPr>
-              <a:t>반려동물과 함께 · 2027. 00. 00</a:t>
+              <a:t>반려동물과 함께 · 날짜 입력</a:t>
             </a:r>
           </a:p>
         </p:txBody>
@@ -3445,7 +3542,7 @@
     <p:bg>
       <p:bgPr>
         <a:solidFill>
-          <a:srgbClr val="EFE0D2"/>
+          <a:srgbClr val="FBF4EC"/>
         </a:solidFill>
         <a:effectLst/>
       </p:bgPr>
@@ -3465,20 +3562,86 @@
         </p:nvSpPr>
         <p:spPr>
           <a:xfrm>
-            <a:off x="274320" y="274320"/>
-            <a:ext cx="11643055" cy="6309360"/>
+            <a:off x="640080" y="566928"/>
+            <a:ext cx="64008" cy="868680"/>
+          </a:xfrm>
+          <a:prstGeom prst="roundRect">
+            <a:avLst>
+              <a:gd name="adj" fmla="val 50000"/>
+            </a:avLst>
+          </a:prstGeom>
+          <a:solidFill>
+            <a:srgbClr val="D8A879"/>
+          </a:solidFill>
+          <a:ln>
+            <a:noFill/>
+          </a:ln>
+        </p:spPr>
+        <p:txBody>
+          <a:bodyPr rtlCol="0" anchor="ctr"/>
+          <a:lstStyle/>
+          <a:p>
+            <a:pPr algn="ctr"/>
+          </a:p>
+        </p:txBody>
+      </p:sp>
+      <p:sp>
+        <p:nvSpPr>
+          <p:cNvPr id="4" name="상단 라벨"/>
+          <p:cNvSpPr txBox="1"/>
+          <p:nvPr/>
+        </p:nvSpPr>
+        <p:spPr>
+          <a:xfrm>
+            <a:off x="868680" y="274320"/>
+            <a:ext cx="5486400" cy="274320"/>
           </a:xfrm>
           <a:prstGeom prst="rect">
             <a:avLst/>
           </a:prstGeom>
+          <a:noFill/>
+        </p:spPr>
+        <p:txBody>
+          <a:bodyPr wrap="square" lIns="54864" rIns="54864" tIns="27432" bIns="27432" anchor="ctr">
+            <a:noAutofit/>
+          </a:bodyPr>
+          <a:lstStyle/>
+          <a:p>
+            <a:pPr algn="l">
+              <a:lnSpc>
+                <a:spcPct val="115000"/>
+              </a:lnSpc>
+            </a:pPr>
+            <a:r>
+              <a:rPr sz="900" b="1" i="0" spc="250">
+                <a:solidFill>
+                  <a:srgbClr val="8E8780"/>
+                </a:solidFill>
+              </a:rPr>
+              <a:t>FAMILY ALBUM</a:t>
+            </a:r>
+          </a:p>
+        </p:txBody>
+      </p:sp>
+      <p:sp>
+        <p:nvSpPr>
+          <p:cNvPr id="5" name="포인트"/>
+          <p:cNvSpPr/>
+          <p:nvPr/>
+        </p:nvSpPr>
+        <p:spPr>
+          <a:xfrm>
+            <a:off x="11167567" y="667512"/>
+            <a:ext cx="310896" cy="310896"/>
+          </a:xfrm>
+          <a:prstGeom prst="sun">
+            <a:avLst/>
+          </a:prstGeom>
           <a:solidFill>
-            <a:srgbClr val="FFFFFF"/>
+            <a:srgbClr val="EBCCAD"/>
           </a:solidFill>
-          <a:ln w="25400">
-            <a:solidFill>
-              <a:srgbClr val="7B5732"/>
-            </a:solidFill>
-            <a:prstDash val="dash"/>
+          <a:ln>
+            <a:noFill/>
           </a:ln>
         </p:spPr>
         <p:txBody>
@@ -3501,8 +3664,8 @@
         </p:nvSpPr>
         <p:spPr>
           <a:xfrm>
-            <a:off x="777240" y="548640"/>
-            <a:ext cx="9357055" cy="822960"/>
+            <a:off x="868680" y="566928"/>
+            <a:ext cx="9448495" cy="868680"/>
           </a:xfrm>
         </p:spPr>
         <p:txBody>
@@ -3519,7 +3682,7 @@
             <a:r>
               <a:rPr sz="3000" b="1" i="0">
                 <a:solidFill>
-                  <a:srgbClr val="3A2918"/>
+                  <a:srgbClr val="26231F"/>
                 </a:solidFill>
               </a:rPr>
               <a:t>가족 구성원</a:t>
@@ -3529,25 +3692,23 @@
       </p:sp>
       <p:sp>
         <p:nvSpPr>
-          <p:cNvPr id="4" name="사진 자리"/>
+          <p:cNvPr id="6" name="사진 자리"/>
           <p:cNvSpPr/>
           <p:nvPr/>
         </p:nvSpPr>
         <p:spPr>
           <a:xfrm>
-            <a:off x="1308049" y="1554480"/>
-            <a:ext cx="2331720" cy="2331720"/>
+            <a:off x="1239469" y="1783080"/>
+            <a:ext cx="2286000" cy="2286000"/>
           </a:xfrm>
           <a:prstGeom prst="ellipse">
             <a:avLst/>
           </a:prstGeom>
           <a:solidFill>
-            <a:srgbClr val="EFE0D2"/>
+            <a:srgbClr val="F6E6D5"/>
           </a:solidFill>
           <a:ln w="19050">
-            <a:solidFill>
-              <a:srgbClr val="7B5732"/>
-            </a:solidFill>
+            <a:noFill/>
             <a:prstDash val="dash"/>
           </a:ln>
         </p:spPr>
@@ -3565,7 +3726,7 @@
             <a:r>
               <a:rPr sz="1200" b="0" i="0">
                 <a:solidFill>
-                  <a:srgbClr val="3A2918"/>
+                  <a:srgbClr val="8E8780"/>
                 </a:solidFill>
               </a:rPr>
               <a:t>사진</a:t>
@@ -3575,14 +3736,14 @@
       </p:sp>
       <p:sp>
         <p:nvSpPr>
-          <p:cNvPr id="5" name="TextBox 4"/>
+          <p:cNvPr id="7" name="TextBox 6"/>
           <p:cNvSpPr txBox="1"/>
           <p:nvPr/>
         </p:nvSpPr>
         <p:spPr>
           <a:xfrm>
-            <a:off x="777240" y="3977639"/>
-            <a:ext cx="3393338" cy="411480"/>
+            <a:off x="640080" y="4160520"/>
+            <a:ext cx="3484778" cy="411480"/>
           </a:xfrm>
           <a:prstGeom prst="rect">
             <a:avLst/>
@@ -3603,7 +3764,7 @@
             <a:r>
               <a:rPr sz="1600" b="1" i="0">
                 <a:solidFill>
-                  <a:srgbClr val="3A2918"/>
+                  <a:srgbClr val="493827"/>
                 </a:solidFill>
               </a:rPr>
               <a:t>보호자 1</a:t>
@@ -3613,14 +3774,14 @@
       </p:sp>
       <p:sp>
         <p:nvSpPr>
-          <p:cNvPr id="6" name="TextBox 5"/>
+          <p:cNvPr id="8" name="TextBox 7"/>
           <p:cNvSpPr txBox="1"/>
           <p:nvPr/>
         </p:nvSpPr>
         <p:spPr>
           <a:xfrm>
-            <a:off x="868680" y="4434840"/>
-            <a:ext cx="3210458" cy="1783079"/>
+            <a:off x="731519" y="4617720"/>
+            <a:ext cx="3301898" cy="1737360"/>
           </a:xfrm>
           <a:prstGeom prst="rect">
             <a:avLst/>
@@ -3681,25 +3842,23 @@
       </p:sp>
       <p:sp>
         <p:nvSpPr>
-          <p:cNvPr id="7" name="사진 자리"/>
+          <p:cNvPr id="9" name="사진 자리"/>
           <p:cNvSpPr/>
           <p:nvPr/>
         </p:nvSpPr>
         <p:spPr>
           <a:xfrm>
-            <a:off x="4929987" y="1554480"/>
-            <a:ext cx="2331720" cy="2331720"/>
+            <a:off x="4952847" y="1783080"/>
+            <a:ext cx="2286000" cy="2286000"/>
           </a:xfrm>
           <a:prstGeom prst="ellipse">
             <a:avLst/>
           </a:prstGeom>
           <a:solidFill>
-            <a:srgbClr val="EFE0D2"/>
+            <a:srgbClr val="F6E6D5"/>
           </a:solidFill>
           <a:ln w="19050">
-            <a:solidFill>
-              <a:srgbClr val="7B5732"/>
-            </a:solidFill>
+            <a:noFill/>
             <a:prstDash val="dash"/>
           </a:ln>
         </p:spPr>
@@ -3717,7 +3876,7 @@
             <a:r>
               <a:rPr sz="1200" b="0" i="0">
                 <a:solidFill>
-                  <a:srgbClr val="3A2918"/>
+                  <a:srgbClr val="8E8780"/>
                 </a:solidFill>
               </a:rPr>
               <a:t>사진</a:t>
@@ -3727,14 +3886,14 @@
       </p:sp>
       <p:sp>
         <p:nvSpPr>
-          <p:cNvPr id="8" name="TextBox 7"/>
+          <p:cNvPr id="10" name="TextBox 9"/>
           <p:cNvSpPr txBox="1"/>
           <p:nvPr/>
         </p:nvSpPr>
         <p:spPr>
           <a:xfrm>
-            <a:off x="4399178" y="3977639"/>
-            <a:ext cx="3393338" cy="411480"/>
+            <a:off x="4353458" y="4160520"/>
+            <a:ext cx="3484778" cy="411480"/>
           </a:xfrm>
           <a:prstGeom prst="rect">
             <a:avLst/>
@@ -3755,7 +3914,7 @@
             <a:r>
               <a:rPr sz="1600" b="1" i="0">
                 <a:solidFill>
-                  <a:srgbClr val="3A2918"/>
+                  <a:srgbClr val="493827"/>
                 </a:solidFill>
               </a:rPr>
               <a:t>보호자 2</a:t>
@@ -3765,14 +3924,14 @@
       </p:sp>
       <p:sp>
         <p:nvSpPr>
-          <p:cNvPr id="9" name="TextBox 8"/>
+          <p:cNvPr id="11" name="TextBox 10"/>
           <p:cNvSpPr txBox="1"/>
           <p:nvPr/>
         </p:nvSpPr>
         <p:spPr>
           <a:xfrm>
-            <a:off x="4490618" y="4434840"/>
-            <a:ext cx="3210458" cy="1783079"/>
+            <a:off x="4444898" y="4617720"/>
+            <a:ext cx="3301898" cy="1737360"/>
           </a:xfrm>
           <a:prstGeom prst="rect">
             <a:avLst/>
@@ -3833,25 +3992,23 @@
       </p:sp>
       <p:sp>
         <p:nvSpPr>
-          <p:cNvPr id="10" name="사진 자리"/>
+          <p:cNvPr id="12" name="사진 자리"/>
           <p:cNvSpPr/>
           <p:nvPr/>
         </p:nvSpPr>
         <p:spPr>
           <a:xfrm>
-            <a:off x="8551926" y="1554480"/>
-            <a:ext cx="2331720" cy="2331720"/>
+            <a:off x="8666226" y="1783080"/>
+            <a:ext cx="2286000" cy="2286000"/>
           </a:xfrm>
           <a:prstGeom prst="ellipse">
             <a:avLst/>
           </a:prstGeom>
           <a:solidFill>
-            <a:srgbClr val="EFE0D2"/>
+            <a:srgbClr val="F6E6D5"/>
           </a:solidFill>
           <a:ln w="19050">
-            <a:solidFill>
-              <a:srgbClr val="7B5732"/>
-            </a:solidFill>
+            <a:noFill/>
             <a:prstDash val="dash"/>
           </a:ln>
         </p:spPr>
@@ -3869,7 +4026,7 @@
             <a:r>
               <a:rPr sz="1200" b="0" i="0">
                 <a:solidFill>
-                  <a:srgbClr val="3A2918"/>
+                  <a:srgbClr val="8E8780"/>
                 </a:solidFill>
               </a:rPr>
               <a:t>사진</a:t>
@@ -3879,14 +4036,14 @@
       </p:sp>
       <p:sp>
         <p:nvSpPr>
-          <p:cNvPr id="11" name="TextBox 10"/>
+          <p:cNvPr id="13" name="TextBox 12"/>
           <p:cNvSpPr txBox="1"/>
           <p:nvPr/>
         </p:nvSpPr>
         <p:spPr>
           <a:xfrm>
-            <a:off x="8021116" y="3977639"/>
-            <a:ext cx="3393338" cy="411480"/>
+            <a:off x="8066836" y="4160520"/>
+            <a:ext cx="3484778" cy="411480"/>
           </a:xfrm>
           <a:prstGeom prst="rect">
             <a:avLst/>
@@ -3907,7 +4064,7 @@
             <a:r>
               <a:rPr sz="1600" b="1" i="0">
                 <a:solidFill>
-                  <a:srgbClr val="3A2918"/>
+                  <a:srgbClr val="493827"/>
                 </a:solidFill>
               </a:rPr>
               <a:t>우리 반려동물</a:t>
@@ -3917,14 +4074,14 @@
       </p:sp>
       <p:sp>
         <p:nvSpPr>
-          <p:cNvPr id="12" name="TextBox 11"/>
+          <p:cNvPr id="14" name="TextBox 13"/>
           <p:cNvSpPr txBox="1"/>
           <p:nvPr/>
         </p:nvSpPr>
         <p:spPr>
           <a:xfrm>
-            <a:off x="8112556" y="4434840"/>
-            <a:ext cx="3210458" cy="1783079"/>
+            <a:off x="8158276" y="4617720"/>
+            <a:ext cx="3301898" cy="1737360"/>
           </a:xfrm>
           <a:prstGeom prst="rect">
             <a:avLst/>
@@ -3997,7 +4154,7 @@
     <p:bg>
       <p:bgPr>
         <a:solidFill>
-          <a:srgbClr val="EFE0D2"/>
+          <a:srgbClr val="FBF4EC"/>
         </a:solidFill>
         <a:effectLst/>
       </p:bgPr>
@@ -4017,20 +4174,86 @@
         </p:nvSpPr>
         <p:spPr>
           <a:xfrm>
-            <a:off x="274320" y="274320"/>
-            <a:ext cx="11643055" cy="6309360"/>
+            <a:off x="640080" y="566928"/>
+            <a:ext cx="64008" cy="868680"/>
+          </a:xfrm>
+          <a:prstGeom prst="roundRect">
+            <a:avLst>
+              <a:gd name="adj" fmla="val 50000"/>
+            </a:avLst>
+          </a:prstGeom>
+          <a:solidFill>
+            <a:srgbClr val="D8A879"/>
+          </a:solidFill>
+          <a:ln>
+            <a:noFill/>
+          </a:ln>
+        </p:spPr>
+        <p:txBody>
+          <a:bodyPr rtlCol="0" anchor="ctr"/>
+          <a:lstStyle/>
+          <a:p>
+            <a:pPr algn="ctr"/>
+          </a:p>
+        </p:txBody>
+      </p:sp>
+      <p:sp>
+        <p:nvSpPr>
+          <p:cNvPr id="4" name="상단 라벨"/>
+          <p:cNvSpPr txBox="1"/>
+          <p:nvPr/>
+        </p:nvSpPr>
+        <p:spPr>
+          <a:xfrm>
+            <a:off x="868680" y="274320"/>
+            <a:ext cx="5486400" cy="274320"/>
           </a:xfrm>
           <a:prstGeom prst="rect">
             <a:avLst/>
           </a:prstGeom>
+          <a:noFill/>
+        </p:spPr>
+        <p:txBody>
+          <a:bodyPr wrap="square" lIns="54864" rIns="54864" tIns="27432" bIns="27432" anchor="ctr">
+            <a:noAutofit/>
+          </a:bodyPr>
+          <a:lstStyle/>
+          <a:p>
+            <a:pPr algn="l">
+              <a:lnSpc>
+                <a:spcPct val="115000"/>
+              </a:lnSpc>
+            </a:pPr>
+            <a:r>
+              <a:rPr sz="900" b="1" i="0" spc="250">
+                <a:solidFill>
+                  <a:srgbClr val="8E8780"/>
+                </a:solidFill>
+              </a:rPr>
+              <a:t>FAMILY ALBUM</a:t>
+            </a:r>
+          </a:p>
+        </p:txBody>
+      </p:sp>
+      <p:sp>
+        <p:nvSpPr>
+          <p:cNvPr id="5" name="포인트"/>
+          <p:cNvSpPr/>
+          <p:nvPr/>
+        </p:nvSpPr>
+        <p:spPr>
+          <a:xfrm>
+            <a:off x="11167567" y="667512"/>
+            <a:ext cx="310896" cy="310896"/>
+          </a:xfrm>
+          <a:prstGeom prst="sun">
+            <a:avLst/>
+          </a:prstGeom>
           <a:solidFill>
-            <a:srgbClr val="FFFFFF"/>
+            <a:srgbClr val="EBCCAD"/>
           </a:solidFill>
-          <a:ln w="25400">
-            <a:solidFill>
-              <a:srgbClr val="7B5732"/>
-            </a:solidFill>
-            <a:prstDash val="dash"/>
+          <a:ln>
+            <a:noFill/>
           </a:ln>
         </p:spPr>
         <p:txBody>
@@ -4053,8 +4276,8 @@
         </p:nvSpPr>
         <p:spPr>
           <a:xfrm>
-            <a:off x="777240" y="548640"/>
-            <a:ext cx="9357055" cy="822960"/>
+            <a:off x="868680" y="566928"/>
+            <a:ext cx="9448495" cy="868680"/>
           </a:xfrm>
         </p:spPr>
         <p:txBody>
@@ -4071,7 +4294,7 @@
             <a:r>
               <a:rPr sz="3000" b="1" i="0">
                 <a:solidFill>
-                  <a:srgbClr val="3A2918"/>
+                  <a:srgbClr val="26231F"/>
                 </a:solidFill>
               </a:rPr>
               <a:t>우리 가족 이야기</a:t>
@@ -4081,20 +4304,20 @@
       </p:sp>
       <p:sp>
         <p:nvSpPr>
-          <p:cNvPr id="4" name="타임라인 선"/>
+          <p:cNvPr id="6" name="타임라인 선"/>
           <p:cNvSpPr/>
           <p:nvPr/>
         </p:nvSpPr>
         <p:spPr>
           <a:xfrm>
-            <a:off x="777240" y="3291840"/>
-            <a:ext cx="10637215" cy="54864"/>
+            <a:off x="640080" y="3520440"/>
+            <a:ext cx="10911535" cy="54864"/>
           </a:xfrm>
           <a:prstGeom prst="rect">
             <a:avLst/>
           </a:prstGeom>
           <a:solidFill>
-            <a:srgbClr val="EFE0D2"/>
+            <a:srgbClr val="F6E6D5"/>
           </a:solidFill>
           <a:ln>
             <a:noFill/>
@@ -4110,20 +4333,20 @@
       </p:sp>
       <p:sp>
         <p:nvSpPr>
-          <p:cNvPr id="5" name="때 1"/>
+          <p:cNvPr id="7" name="때 1"/>
           <p:cNvSpPr/>
           <p:nvPr/>
         </p:nvSpPr>
         <p:spPr>
           <a:xfrm>
-            <a:off x="1905723" y="3108960"/>
+            <a:off x="1802853" y="3337560"/>
             <a:ext cx="402336" cy="402336"/>
           </a:xfrm>
           <a:prstGeom prst="ellipse">
             <a:avLst/>
           </a:prstGeom>
           <a:solidFill>
-            <a:srgbClr val="7B5732"/>
+            <a:srgbClr val="D8A879"/>
           </a:solidFill>
           <a:ln w="38100">
             <a:solidFill>
@@ -4141,14 +4364,14 @@
       </p:sp>
       <p:sp>
         <p:nvSpPr>
-          <p:cNvPr id="6" name="TextBox 5"/>
+          <p:cNvPr id="8" name="TextBox 7"/>
           <p:cNvSpPr txBox="1"/>
           <p:nvPr/>
         </p:nvSpPr>
         <p:spPr>
           <a:xfrm>
-            <a:off x="822959" y="2468880"/>
-            <a:ext cx="2567863" cy="457200"/>
+            <a:off x="685800" y="2697480"/>
+            <a:ext cx="2636443" cy="457200"/>
           </a:xfrm>
           <a:prstGeom prst="rect">
             <a:avLst/>
@@ -4169,7 +4392,7 @@
             <a:r>
               <a:rPr sz="1600" b="1" i="0">
                 <a:solidFill>
-                  <a:srgbClr val="7B5732"/>
+                  <a:srgbClr val="D8A879"/>
                 </a:solidFill>
               </a:rPr>
               <a:t>처음 만난 날</a:t>
@@ -4179,14 +4402,14 @@
       </p:sp>
       <p:sp>
         <p:nvSpPr>
-          <p:cNvPr id="7" name="TextBox 6"/>
+          <p:cNvPr id="9" name="TextBox 8"/>
           <p:cNvSpPr txBox="1"/>
           <p:nvPr/>
         </p:nvSpPr>
         <p:spPr>
           <a:xfrm>
-            <a:off x="868679" y="3657600"/>
-            <a:ext cx="2476423" cy="457200"/>
+            <a:off x="731519" y="3886200"/>
+            <a:ext cx="2545003" cy="457200"/>
           </a:xfrm>
           <a:prstGeom prst="rect">
             <a:avLst/>
@@ -4207,7 +4430,7 @@
             <a:r>
               <a:rPr sz="1800" b="1" i="0">
                 <a:solidFill>
-                  <a:srgbClr val="3A2918"/>
+                  <a:srgbClr val="493827"/>
                 </a:solidFill>
               </a:rPr>
               <a:t>우리의 인연</a:t>
@@ -4217,14 +4440,14 @@
       </p:sp>
       <p:sp>
         <p:nvSpPr>
-          <p:cNvPr id="8" name="TextBox 7"/>
+          <p:cNvPr id="10" name="TextBox 9"/>
           <p:cNvSpPr txBox="1"/>
           <p:nvPr/>
         </p:nvSpPr>
         <p:spPr>
           <a:xfrm>
-            <a:off x="868679" y="4160520"/>
-            <a:ext cx="2476423" cy="1645920"/>
+            <a:off x="731519" y="4389120"/>
+            <a:ext cx="2545003" cy="1645920"/>
           </a:xfrm>
           <a:prstGeom prst="rect">
             <a:avLst/>
@@ -4245,7 +4468,7 @@
             <a:r>
               <a:rPr sz="1500" b="0" i="0">
                 <a:solidFill>
-                  <a:srgbClr val="2B2B2B"/>
+                  <a:srgbClr val="26231F"/>
                 </a:solidFill>
               </a:rPr>
               <a:t>입양하던 날의 이야기</a:t>
@@ -4255,20 +4478,20 @@
       </p:sp>
       <p:sp>
         <p:nvSpPr>
-          <p:cNvPr id="9" name="때 2"/>
+          <p:cNvPr id="11" name="때 2"/>
           <p:cNvSpPr/>
           <p:nvPr/>
         </p:nvSpPr>
         <p:spPr>
           <a:xfrm>
-            <a:off x="4565027" y="3108960"/>
+            <a:off x="4530737" y="3337560"/>
             <a:ext cx="402336" cy="402336"/>
           </a:xfrm>
           <a:prstGeom prst="ellipse">
             <a:avLst/>
           </a:prstGeom>
           <a:solidFill>
-            <a:srgbClr val="7B5732"/>
+            <a:srgbClr val="D8A879"/>
           </a:solidFill>
           <a:ln w="38100">
             <a:solidFill>
@@ -4286,14 +4509,14 @@
       </p:sp>
       <p:sp>
         <p:nvSpPr>
-          <p:cNvPr id="10" name="TextBox 9"/>
+          <p:cNvPr id="12" name="TextBox 11"/>
           <p:cNvSpPr txBox="1"/>
           <p:nvPr/>
         </p:nvSpPr>
         <p:spPr>
           <a:xfrm>
-            <a:off x="3482263" y="2468880"/>
-            <a:ext cx="2567863" cy="457200"/>
+            <a:off x="3413683" y="2697480"/>
+            <a:ext cx="2636443" cy="457200"/>
           </a:xfrm>
           <a:prstGeom prst="rect">
             <a:avLst/>
@@ -4314,7 +4537,7 @@
             <a:r>
               <a:rPr sz="1600" b="1" i="0">
                 <a:solidFill>
-                  <a:srgbClr val="7B5732"/>
+                  <a:srgbClr val="D8A879"/>
                 </a:solidFill>
               </a:rPr>
               <a:t>첫 산책</a:t>
@@ -4324,14 +4547,14 @@
       </p:sp>
       <p:sp>
         <p:nvSpPr>
-          <p:cNvPr id="11" name="TextBox 10"/>
+          <p:cNvPr id="13" name="TextBox 12"/>
           <p:cNvSpPr txBox="1"/>
           <p:nvPr/>
         </p:nvSpPr>
         <p:spPr>
           <a:xfrm>
-            <a:off x="3527983" y="3657600"/>
-            <a:ext cx="2476423" cy="457200"/>
+            <a:off x="3459403" y="3886200"/>
+            <a:ext cx="2545003" cy="457200"/>
           </a:xfrm>
           <a:prstGeom prst="rect">
             <a:avLst/>
@@ -4352,7 +4575,7 @@
             <a:r>
               <a:rPr sz="1800" b="1" i="0">
                 <a:solidFill>
-                  <a:srgbClr val="3A2918"/>
+                  <a:srgbClr val="493827"/>
                 </a:solidFill>
               </a:rPr>
               <a:t>함께한 첫 걸음</a:t>
@@ -4362,14 +4585,14 @@
       </p:sp>
       <p:sp>
         <p:nvSpPr>
-          <p:cNvPr id="12" name="TextBox 11"/>
+          <p:cNvPr id="14" name="TextBox 13"/>
           <p:cNvSpPr txBox="1"/>
           <p:nvPr/>
         </p:nvSpPr>
         <p:spPr>
           <a:xfrm>
-            <a:off x="3527983" y="4160520"/>
-            <a:ext cx="2476423" cy="1645920"/>
+            <a:off x="3459403" y="4389120"/>
+            <a:ext cx="2545003" cy="1645920"/>
           </a:xfrm>
           <a:prstGeom prst="rect">
             <a:avLst/>
@@ -4390,7 +4613,7 @@
             <a:r>
               <a:rPr sz="1500" b="0" i="0">
                 <a:solidFill>
-                  <a:srgbClr val="2B2B2B"/>
+                  <a:srgbClr val="26231F"/>
                 </a:solidFill>
               </a:rPr>
               <a:t>그날의 기억을 적어요</a:t>
@@ -4400,20 +4623,20 @@
       </p:sp>
       <p:sp>
         <p:nvSpPr>
-          <p:cNvPr id="13" name="때 3"/>
+          <p:cNvPr id="15" name="때 3"/>
           <p:cNvSpPr/>
           <p:nvPr/>
         </p:nvSpPr>
         <p:spPr>
           <a:xfrm>
-            <a:off x="7224331" y="3108960"/>
+            <a:off x="7258621" y="3337560"/>
             <a:ext cx="402336" cy="402336"/>
           </a:xfrm>
           <a:prstGeom prst="ellipse">
             <a:avLst/>
           </a:prstGeom>
           <a:solidFill>
-            <a:srgbClr val="7B5732"/>
+            <a:srgbClr val="D8A879"/>
           </a:solidFill>
           <a:ln w="38100">
             <a:solidFill>
@@ -4431,14 +4654,14 @@
       </p:sp>
       <p:sp>
         <p:nvSpPr>
-          <p:cNvPr id="14" name="TextBox 13"/>
+          <p:cNvPr id="16" name="TextBox 15"/>
           <p:cNvSpPr txBox="1"/>
           <p:nvPr/>
         </p:nvSpPr>
         <p:spPr>
           <a:xfrm>
-            <a:off x="6141567" y="2468880"/>
-            <a:ext cx="2567863" cy="457200"/>
+            <a:off x="6141567" y="2697480"/>
+            <a:ext cx="2636443" cy="457200"/>
           </a:xfrm>
           <a:prstGeom prst="rect">
             <a:avLst/>
@@ -4459,7 +4682,7 @@
             <a:r>
               <a:rPr sz="1600" b="1" i="0">
                 <a:solidFill>
-                  <a:srgbClr val="7B5732"/>
+                  <a:srgbClr val="D8A879"/>
                 </a:solidFill>
               </a:rPr>
               <a:t>가장 웃었던 날</a:t>
@@ -4469,14 +4692,14 @@
       </p:sp>
       <p:sp>
         <p:nvSpPr>
-          <p:cNvPr id="15" name="TextBox 14"/>
+          <p:cNvPr id="17" name="TextBox 16"/>
           <p:cNvSpPr txBox="1"/>
           <p:nvPr/>
         </p:nvSpPr>
         <p:spPr>
           <a:xfrm>
-            <a:off x="6187287" y="3657600"/>
-            <a:ext cx="2476423" cy="457200"/>
+            <a:off x="6187287" y="3886200"/>
+            <a:ext cx="2545003" cy="457200"/>
           </a:xfrm>
           <a:prstGeom prst="rect">
             <a:avLst/>
@@ -4497,7 +4720,7 @@
             <a:r>
               <a:rPr sz="1800" b="1" i="0">
                 <a:solidFill>
-                  <a:srgbClr val="3A2918"/>
+                  <a:srgbClr val="493827"/>
                 </a:solidFill>
               </a:rPr>
               <a:t>잊지 못할 순간</a:t>
@@ -4507,14 +4730,14 @@
       </p:sp>
       <p:sp>
         <p:nvSpPr>
-          <p:cNvPr id="16" name="TextBox 15"/>
+          <p:cNvPr id="18" name="TextBox 17"/>
           <p:cNvSpPr txBox="1"/>
           <p:nvPr/>
         </p:nvSpPr>
         <p:spPr>
           <a:xfrm>
-            <a:off x="6187287" y="4160520"/>
-            <a:ext cx="2476423" cy="1645920"/>
+            <a:off x="6187287" y="4389120"/>
+            <a:ext cx="2545003" cy="1645920"/>
           </a:xfrm>
           <a:prstGeom prst="rect">
             <a:avLst/>
@@ -4535,7 +4758,7 @@
             <a:r>
               <a:rPr sz="1500" b="0" i="0">
                 <a:solidFill>
-                  <a:srgbClr val="2B2B2B"/>
+                  <a:srgbClr val="26231F"/>
                 </a:solidFill>
               </a:rPr>
               <a:t>사진으로 남겨 두세요</a:t>
@@ -4545,20 +4768,20 @@
       </p:sp>
       <p:sp>
         <p:nvSpPr>
-          <p:cNvPr id="17" name="때 4"/>
+          <p:cNvPr id="19" name="때 4"/>
           <p:cNvSpPr/>
           <p:nvPr/>
         </p:nvSpPr>
         <p:spPr>
           <a:xfrm>
-            <a:off x="9883635" y="3108960"/>
+            <a:off x="9986505" y="3337560"/>
             <a:ext cx="402336" cy="402336"/>
           </a:xfrm>
           <a:prstGeom prst="ellipse">
             <a:avLst/>
           </a:prstGeom>
           <a:solidFill>
-            <a:srgbClr val="7B5732"/>
+            <a:srgbClr val="D8A879"/>
           </a:solidFill>
           <a:ln w="38100">
             <a:solidFill>
@@ -4576,14 +4799,14 @@
       </p:sp>
       <p:sp>
         <p:nvSpPr>
-          <p:cNvPr id="18" name="TextBox 17"/>
+          <p:cNvPr id="20" name="TextBox 19"/>
           <p:cNvSpPr txBox="1"/>
           <p:nvPr/>
         </p:nvSpPr>
         <p:spPr>
           <a:xfrm>
-            <a:off x="8800871" y="2468880"/>
-            <a:ext cx="2567863" cy="457200"/>
+            <a:off x="8869451" y="2697480"/>
+            <a:ext cx="2636443" cy="457200"/>
           </a:xfrm>
           <a:prstGeom prst="rect">
             <a:avLst/>
@@ -4604,7 +4827,7 @@
             <a:r>
               <a:rPr sz="1600" b="1" i="0">
                 <a:solidFill>
-                  <a:srgbClr val="7B5732"/>
+                  <a:srgbClr val="D8A879"/>
                 </a:solidFill>
               </a:rPr>
               <a:t>지금</a:t>
@@ -4614,14 +4837,14 @@
       </p:sp>
       <p:sp>
         <p:nvSpPr>
-          <p:cNvPr id="19" name="TextBox 18"/>
+          <p:cNvPr id="21" name="TextBox 20"/>
           <p:cNvSpPr txBox="1"/>
           <p:nvPr/>
         </p:nvSpPr>
         <p:spPr>
           <a:xfrm>
-            <a:off x="8846591" y="3657600"/>
-            <a:ext cx="2476423" cy="457200"/>
+            <a:off x="8915171" y="3886200"/>
+            <a:ext cx="2545003" cy="457200"/>
           </a:xfrm>
           <a:prstGeom prst="rect">
             <a:avLst/>
@@ -4642,7 +4865,7 @@
             <a:r>
               <a:rPr sz="1800" b="1" i="0">
                 <a:solidFill>
-                  <a:srgbClr val="3A2918"/>
+                  <a:srgbClr val="493827"/>
                 </a:solidFill>
               </a:rPr>
               <a:t>오늘의 우리</a:t>
@@ -4652,14 +4875,14 @@
       </p:sp>
       <p:sp>
         <p:nvSpPr>
-          <p:cNvPr id="20" name="TextBox 19"/>
+          <p:cNvPr id="22" name="TextBox 21"/>
           <p:cNvSpPr txBox="1"/>
           <p:nvPr/>
         </p:nvSpPr>
         <p:spPr>
           <a:xfrm>
-            <a:off x="8846591" y="4160520"/>
-            <a:ext cx="2476423" cy="1645920"/>
+            <a:off x="8915171" y="4389120"/>
+            <a:ext cx="2545003" cy="1645920"/>
           </a:xfrm>
           <a:prstGeom prst="rect">
             <a:avLst/>
@@ -4680,7 +4903,7 @@
             <a:r>
               <a:rPr sz="1500" b="0" i="0">
                 <a:solidFill>
-                  <a:srgbClr val="2B2B2B"/>
+                  <a:srgbClr val="26231F"/>
                 </a:solidFill>
               </a:rPr>
               <a:t>요즘 우리 이야기</a:t>
@@ -4702,7 +4925,7 @@
     <p:bg>
       <p:bgPr>
         <a:solidFill>
-          <a:srgbClr val="EFE0D2"/>
+          <a:srgbClr val="FBF4EC"/>
         </a:solidFill>
         <a:effectLst/>
       </p:bgPr>
@@ -4722,20 +4945,86 @@
         </p:nvSpPr>
         <p:spPr>
           <a:xfrm>
-            <a:off x="274320" y="274320"/>
-            <a:ext cx="11643055" cy="6309360"/>
+            <a:off x="640080" y="566928"/>
+            <a:ext cx="64008" cy="868680"/>
+          </a:xfrm>
+          <a:prstGeom prst="roundRect">
+            <a:avLst>
+              <a:gd name="adj" fmla="val 50000"/>
+            </a:avLst>
+          </a:prstGeom>
+          <a:solidFill>
+            <a:srgbClr val="D8A879"/>
+          </a:solidFill>
+          <a:ln>
+            <a:noFill/>
+          </a:ln>
+        </p:spPr>
+        <p:txBody>
+          <a:bodyPr rtlCol="0" anchor="ctr"/>
+          <a:lstStyle/>
+          <a:p>
+            <a:pPr algn="ctr"/>
+          </a:p>
+        </p:txBody>
+      </p:sp>
+      <p:sp>
+        <p:nvSpPr>
+          <p:cNvPr id="4" name="상단 라벨"/>
+          <p:cNvSpPr txBox="1"/>
+          <p:nvPr/>
+        </p:nvSpPr>
+        <p:spPr>
+          <a:xfrm>
+            <a:off x="868680" y="274320"/>
+            <a:ext cx="5486400" cy="274320"/>
           </a:xfrm>
           <a:prstGeom prst="rect">
             <a:avLst/>
           </a:prstGeom>
+          <a:noFill/>
+        </p:spPr>
+        <p:txBody>
+          <a:bodyPr wrap="square" lIns="54864" rIns="54864" tIns="27432" bIns="27432" anchor="ctr">
+            <a:noAutofit/>
+          </a:bodyPr>
+          <a:lstStyle/>
+          <a:p>
+            <a:pPr algn="l">
+              <a:lnSpc>
+                <a:spcPct val="115000"/>
+              </a:lnSpc>
+            </a:pPr>
+            <a:r>
+              <a:rPr sz="900" b="1" i="0" spc="250">
+                <a:solidFill>
+                  <a:srgbClr val="8E8780"/>
+                </a:solidFill>
+              </a:rPr>
+              <a:t>FAMILY ALBUM</a:t>
+            </a:r>
+          </a:p>
+        </p:txBody>
+      </p:sp>
+      <p:sp>
+        <p:nvSpPr>
+          <p:cNvPr id="5" name="포인트"/>
+          <p:cNvSpPr/>
+          <p:nvPr/>
+        </p:nvSpPr>
+        <p:spPr>
+          <a:xfrm>
+            <a:off x="11167567" y="667512"/>
+            <a:ext cx="310896" cy="310896"/>
+          </a:xfrm>
+          <a:prstGeom prst="sun">
+            <a:avLst/>
+          </a:prstGeom>
           <a:solidFill>
-            <a:srgbClr val="FFFFFF"/>
+            <a:srgbClr val="EBCCAD"/>
           </a:solidFill>
-          <a:ln w="25400">
-            <a:solidFill>
-              <a:srgbClr val="7B5732"/>
-            </a:solidFill>
-            <a:prstDash val="dash"/>
+          <a:ln>
+            <a:noFill/>
           </a:ln>
         </p:spPr>
         <p:txBody>
@@ -4758,8 +5047,8 @@
         </p:nvSpPr>
         <p:spPr>
           <a:xfrm>
-            <a:off x="777240" y="548640"/>
-            <a:ext cx="9357055" cy="822960"/>
+            <a:off x="868680" y="566928"/>
+            <a:ext cx="9448495" cy="868680"/>
           </a:xfrm>
         </p:spPr>
         <p:txBody>
@@ -4776,7 +5065,7 @@
             <a:r>
               <a:rPr sz="3000" b="1" i="0">
                 <a:solidFill>
-                  <a:srgbClr val="3A2918"/>
+                  <a:srgbClr val="26231F"/>
                 </a:solidFill>
               </a:rPr>
               <a:t>우리 가족의 약속</a:t>
@@ -4786,56 +5075,54 @@
       </p:sp>
       <p:sp>
         <p:nvSpPr>
-          <p:cNvPr id="4" name="줄 1"/>
+          <p:cNvPr id="6" name="줄 1"/>
           <p:cNvSpPr/>
           <p:nvPr/>
         </p:nvSpPr>
         <p:spPr>
           <a:xfrm>
-            <a:off x="777240" y="1554480"/>
-            <a:ext cx="10637215" cy="1005840"/>
+            <a:off x="640080" y="1783080"/>
+            <a:ext cx="10911535" cy="1005840"/>
           </a:xfrm>
           <a:prstGeom prst="roundRect">
             <a:avLst>
-              <a:gd name="adj" fmla="val 8000"/>
+              <a:gd name="adj" fmla="val 7000"/>
             </a:avLst>
           </a:prstGeom>
           <a:solidFill>
-            <a:srgbClr val="F9F5F1"/>
-          </a:solidFill>
-          <a:ln w="12700">
-            <a:solidFill>
-              <a:srgbClr val="EFE0D2"/>
-            </a:solidFill>
-          </a:ln>
-        </p:spPr>
-        <p:txBody>
-          <a:bodyPr rtlCol="0" anchor="ctr"/>
-          <a:lstStyle/>
-          <a:p>
-            <a:pPr algn="ctr"/>
-          </a:p>
-        </p:txBody>
-      </p:sp>
-      <p:sp>
-        <p:nvSpPr>
-          <p:cNvPr id="5" name="번호 1"/>
-          <p:cNvSpPr/>
-          <p:nvPr/>
-        </p:nvSpPr>
-        <p:spPr>
-          <a:xfrm>
-            <a:off x="960120" y="1828800"/>
-            <a:ext cx="457200" cy="457200"/>
-          </a:xfrm>
-          <a:prstGeom prst="ellipse">
-            <a:avLst/>
-          </a:prstGeom>
-          <a:solidFill>
-            <a:srgbClr val="7B5732"/>
+            <a:srgbClr val="FBF4EC"/>
           </a:solidFill>
           <a:ln>
             <a:noFill/>
+          </a:ln>
+        </p:spPr>
+        <p:txBody>
+          <a:bodyPr rtlCol="0" anchor="ctr"/>
+          <a:lstStyle/>
+          <a:p>
+            <a:pPr algn="ctr"/>
+          </a:p>
+        </p:txBody>
+      </p:sp>
+      <p:sp>
+        <p:nvSpPr>
+          <p:cNvPr id="7" name="번호 1"/>
+          <p:cNvSpPr/>
+          <p:nvPr/>
+        </p:nvSpPr>
+        <p:spPr>
+          <a:xfrm>
+            <a:off x="822959" y="2057400"/>
+            <a:ext cx="457200" cy="457200"/>
+          </a:xfrm>
+          <a:prstGeom prst="ellipse">
+            <a:avLst/>
+          </a:prstGeom>
+          <a:noFill/>
+          <a:ln w="19050">
+            <a:solidFill>
+              <a:srgbClr val="D8A879"/>
+            </a:solidFill>
           </a:ln>
         </p:spPr>
         <p:txBody>
@@ -4852,7 +5139,7 @@
             <a:r>
               <a:rPr sz="1600" b="1" i="0">
                 <a:solidFill>
-                  <a:srgbClr val="FFFFFF"/>
+                  <a:srgbClr val="493827"/>
                 </a:solidFill>
               </a:rPr>
               <a:t>1</a:t>
@@ -4862,13 +5149,13 @@
       </p:sp>
       <p:sp>
         <p:nvSpPr>
-          <p:cNvPr id="6" name="TextBox 5"/>
+          <p:cNvPr id="8" name="TextBox 7"/>
           <p:cNvSpPr txBox="1"/>
           <p:nvPr/>
         </p:nvSpPr>
         <p:spPr>
           <a:xfrm>
-            <a:off x="1645919" y="1600200"/>
+            <a:off x="1508760" y="1828800"/>
             <a:ext cx="2743200" cy="914400"/>
           </a:xfrm>
           <a:prstGeom prst="rect">
@@ -4890,7 +5177,7 @@
             <a:r>
               <a:rPr sz="1800" b="1" i="0">
                 <a:solidFill>
-                  <a:srgbClr val="3A2918"/>
+                  <a:srgbClr val="493827"/>
                 </a:solidFill>
               </a:rPr>
               <a:t>약속 1</a:t>
@@ -4900,14 +5187,14 @@
       </p:sp>
       <p:sp>
         <p:nvSpPr>
-          <p:cNvPr id="7" name="TextBox 6"/>
+          <p:cNvPr id="9" name="TextBox 8"/>
           <p:cNvSpPr txBox="1"/>
           <p:nvPr/>
         </p:nvSpPr>
         <p:spPr>
           <a:xfrm>
-            <a:off x="4434840" y="1600200"/>
-            <a:ext cx="6796735" cy="914400"/>
+            <a:off x="4297680" y="1828800"/>
+            <a:ext cx="7071055" cy="914400"/>
           </a:xfrm>
           <a:prstGeom prst="rect">
             <a:avLst/>
@@ -4928,7 +5215,7 @@
             <a:r>
               <a:rPr sz="1700" b="0" i="0">
                 <a:solidFill>
-                  <a:srgbClr val="2B2B2B"/>
+                  <a:srgbClr val="26231F"/>
                 </a:solidFill>
               </a:rPr>
               <a:t>산책은 하루도 거르지 않기</a:t>
@@ -4938,56 +5225,54 @@
       </p:sp>
       <p:sp>
         <p:nvSpPr>
-          <p:cNvPr id="8" name="줄 2"/>
+          <p:cNvPr id="10" name="줄 2"/>
           <p:cNvSpPr/>
           <p:nvPr/>
         </p:nvSpPr>
         <p:spPr>
           <a:xfrm>
-            <a:off x="777240" y="2697480"/>
-            <a:ext cx="10637215" cy="1005840"/>
+            <a:off x="640080" y="2926080"/>
+            <a:ext cx="10911535" cy="1005840"/>
           </a:xfrm>
           <a:prstGeom prst="roundRect">
             <a:avLst>
-              <a:gd name="adj" fmla="val 8000"/>
+              <a:gd name="adj" fmla="val 7000"/>
             </a:avLst>
           </a:prstGeom>
           <a:solidFill>
-            <a:srgbClr val="F9F5F1"/>
-          </a:solidFill>
-          <a:ln w="12700">
-            <a:solidFill>
-              <a:srgbClr val="EFE0D2"/>
-            </a:solidFill>
-          </a:ln>
-        </p:spPr>
-        <p:txBody>
-          <a:bodyPr rtlCol="0" anchor="ctr"/>
-          <a:lstStyle/>
-          <a:p>
-            <a:pPr algn="ctr"/>
-          </a:p>
-        </p:txBody>
-      </p:sp>
-      <p:sp>
-        <p:nvSpPr>
-          <p:cNvPr id="9" name="번호 2"/>
-          <p:cNvSpPr/>
-          <p:nvPr/>
-        </p:nvSpPr>
-        <p:spPr>
-          <a:xfrm>
-            <a:off x="960120" y="2971800"/>
-            <a:ext cx="457200" cy="457200"/>
-          </a:xfrm>
-          <a:prstGeom prst="ellipse">
-            <a:avLst/>
-          </a:prstGeom>
-          <a:solidFill>
-            <a:srgbClr val="7B5732"/>
+            <a:srgbClr val="FBF4EC"/>
           </a:solidFill>
           <a:ln>
             <a:noFill/>
+          </a:ln>
+        </p:spPr>
+        <p:txBody>
+          <a:bodyPr rtlCol="0" anchor="ctr"/>
+          <a:lstStyle/>
+          <a:p>
+            <a:pPr algn="ctr"/>
+          </a:p>
+        </p:txBody>
+      </p:sp>
+      <p:sp>
+        <p:nvSpPr>
+          <p:cNvPr id="11" name="번호 2"/>
+          <p:cNvSpPr/>
+          <p:nvPr/>
+        </p:nvSpPr>
+        <p:spPr>
+          <a:xfrm>
+            <a:off x="822959" y="3200400"/>
+            <a:ext cx="457200" cy="457200"/>
+          </a:xfrm>
+          <a:prstGeom prst="ellipse">
+            <a:avLst/>
+          </a:prstGeom>
+          <a:noFill/>
+          <a:ln w="19050">
+            <a:solidFill>
+              <a:srgbClr val="D8A879"/>
+            </a:solidFill>
           </a:ln>
         </p:spPr>
         <p:txBody>
@@ -5004,7 +5289,7 @@
             <a:r>
               <a:rPr sz="1600" b="1" i="0">
                 <a:solidFill>
-                  <a:srgbClr val="FFFFFF"/>
+                  <a:srgbClr val="493827"/>
                 </a:solidFill>
               </a:rPr>
               <a:t>2</a:t>
@@ -5014,13 +5299,13 @@
       </p:sp>
       <p:sp>
         <p:nvSpPr>
-          <p:cNvPr id="10" name="TextBox 9"/>
+          <p:cNvPr id="12" name="TextBox 11"/>
           <p:cNvSpPr txBox="1"/>
           <p:nvPr/>
         </p:nvSpPr>
         <p:spPr>
           <a:xfrm>
-            <a:off x="1645919" y="2743200"/>
+            <a:off x="1508760" y="2971800"/>
             <a:ext cx="2743200" cy="914400"/>
           </a:xfrm>
           <a:prstGeom prst="rect">
@@ -5042,7 +5327,7 @@
             <a:r>
               <a:rPr sz="1800" b="1" i="0">
                 <a:solidFill>
-                  <a:srgbClr val="3A2918"/>
+                  <a:srgbClr val="493827"/>
                 </a:solidFill>
               </a:rPr>
               <a:t>약속 2</a:t>
@@ -5052,14 +5337,14 @@
       </p:sp>
       <p:sp>
         <p:nvSpPr>
-          <p:cNvPr id="11" name="TextBox 10"/>
+          <p:cNvPr id="13" name="TextBox 12"/>
           <p:cNvSpPr txBox="1"/>
           <p:nvPr/>
         </p:nvSpPr>
         <p:spPr>
           <a:xfrm>
-            <a:off x="4434840" y="2743200"/>
-            <a:ext cx="6796735" cy="914400"/>
+            <a:off x="4297680" y="2971800"/>
+            <a:ext cx="7071055" cy="914400"/>
           </a:xfrm>
           <a:prstGeom prst="rect">
             <a:avLst/>
@@ -5080,7 +5365,7 @@
             <a:r>
               <a:rPr sz="1700" b="0" i="0">
                 <a:solidFill>
-                  <a:srgbClr val="2B2B2B"/>
+                  <a:srgbClr val="26231F"/>
                 </a:solidFill>
               </a:rPr>
               <a:t>건강 검진 날짜 챙기기</a:t>
@@ -5090,56 +5375,54 @@
       </p:sp>
       <p:sp>
         <p:nvSpPr>
-          <p:cNvPr id="12" name="줄 3"/>
+          <p:cNvPr id="14" name="줄 3"/>
           <p:cNvSpPr/>
           <p:nvPr/>
         </p:nvSpPr>
         <p:spPr>
           <a:xfrm>
-            <a:off x="777240" y="3840480"/>
-            <a:ext cx="10637215" cy="1005840"/>
+            <a:off x="640080" y="4069080"/>
+            <a:ext cx="10911535" cy="1005840"/>
           </a:xfrm>
           <a:prstGeom prst="roundRect">
             <a:avLst>
-              <a:gd name="adj" fmla="val 8000"/>
+              <a:gd name="adj" fmla="val 7000"/>
             </a:avLst>
           </a:prstGeom>
           <a:solidFill>
-            <a:srgbClr val="F9F5F1"/>
-          </a:solidFill>
-          <a:ln w="12700">
-            <a:solidFill>
-              <a:srgbClr val="EFE0D2"/>
-            </a:solidFill>
-          </a:ln>
-        </p:spPr>
-        <p:txBody>
-          <a:bodyPr rtlCol="0" anchor="ctr"/>
-          <a:lstStyle/>
-          <a:p>
-            <a:pPr algn="ctr"/>
-          </a:p>
-        </p:txBody>
-      </p:sp>
-      <p:sp>
-        <p:nvSpPr>
-          <p:cNvPr id="13" name="번호 3"/>
-          <p:cNvSpPr/>
-          <p:nvPr/>
-        </p:nvSpPr>
-        <p:spPr>
-          <a:xfrm>
-            <a:off x="960120" y="4114800"/>
-            <a:ext cx="457200" cy="457200"/>
-          </a:xfrm>
-          <a:prstGeom prst="ellipse">
-            <a:avLst/>
-          </a:prstGeom>
-          <a:solidFill>
-            <a:srgbClr val="7B5732"/>
+            <a:srgbClr val="FBF4EC"/>
           </a:solidFill>
           <a:ln>
             <a:noFill/>
+          </a:ln>
+        </p:spPr>
+        <p:txBody>
+          <a:bodyPr rtlCol="0" anchor="ctr"/>
+          <a:lstStyle/>
+          <a:p>
+            <a:pPr algn="ctr"/>
+          </a:p>
+        </p:txBody>
+      </p:sp>
+      <p:sp>
+        <p:nvSpPr>
+          <p:cNvPr id="15" name="번호 3"/>
+          <p:cNvSpPr/>
+          <p:nvPr/>
+        </p:nvSpPr>
+        <p:spPr>
+          <a:xfrm>
+            <a:off x="822959" y="4343400"/>
+            <a:ext cx="457200" cy="457200"/>
+          </a:xfrm>
+          <a:prstGeom prst="ellipse">
+            <a:avLst/>
+          </a:prstGeom>
+          <a:noFill/>
+          <a:ln w="19050">
+            <a:solidFill>
+              <a:srgbClr val="D8A879"/>
+            </a:solidFill>
           </a:ln>
         </p:spPr>
         <p:txBody>
@@ -5156,7 +5439,7 @@
             <a:r>
               <a:rPr sz="1600" b="1" i="0">
                 <a:solidFill>
-                  <a:srgbClr val="FFFFFF"/>
+                  <a:srgbClr val="493827"/>
                 </a:solidFill>
               </a:rPr>
               <a:t>3</a:t>
@@ -5166,13 +5449,13 @@
       </p:sp>
       <p:sp>
         <p:nvSpPr>
-          <p:cNvPr id="14" name="TextBox 13"/>
+          <p:cNvPr id="16" name="TextBox 15"/>
           <p:cNvSpPr txBox="1"/>
           <p:nvPr/>
         </p:nvSpPr>
         <p:spPr>
           <a:xfrm>
-            <a:off x="1645919" y="3886200"/>
+            <a:off x="1508760" y="4114800"/>
             <a:ext cx="2743200" cy="914400"/>
           </a:xfrm>
           <a:prstGeom prst="rect">
@@ -5194,7 +5477,7 @@
             <a:r>
               <a:rPr sz="1800" b="1" i="0">
                 <a:solidFill>
-                  <a:srgbClr val="3A2918"/>
+                  <a:srgbClr val="493827"/>
                 </a:solidFill>
               </a:rPr>
               <a:t>약속 3</a:t>
@@ -5204,14 +5487,14 @@
       </p:sp>
       <p:sp>
         <p:nvSpPr>
-          <p:cNvPr id="15" name="TextBox 14"/>
+          <p:cNvPr id="17" name="TextBox 16"/>
           <p:cNvSpPr txBox="1"/>
           <p:nvPr/>
         </p:nvSpPr>
         <p:spPr>
           <a:xfrm>
-            <a:off x="4434840" y="3886200"/>
-            <a:ext cx="6796735" cy="914400"/>
+            <a:off x="4297680" y="4114800"/>
+            <a:ext cx="7071055" cy="914400"/>
           </a:xfrm>
           <a:prstGeom prst="rect">
             <a:avLst/>
@@ -5232,7 +5515,7 @@
             <a:r>
               <a:rPr sz="1700" b="0" i="0">
                 <a:solidFill>
-                  <a:srgbClr val="2B2B2B"/>
+                  <a:srgbClr val="26231F"/>
                 </a:solidFill>
               </a:rPr>
               <a:t>많이 안아 주고 많이 칭찬하기</a:t>
@@ -5254,7 +5537,7 @@
     <p:bg>
       <p:bgPr>
         <a:solidFill>
-          <a:srgbClr val="EFE0D2"/>
+          <a:srgbClr val="FBF4EC"/>
         </a:solidFill>
         <a:effectLst/>
       </p:bgPr>
@@ -5274,20 +5557,86 @@
         </p:nvSpPr>
         <p:spPr>
           <a:xfrm>
-            <a:off x="274320" y="274320"/>
-            <a:ext cx="11643055" cy="6309360"/>
+            <a:off x="640080" y="566928"/>
+            <a:ext cx="64008" cy="868680"/>
+          </a:xfrm>
+          <a:prstGeom prst="roundRect">
+            <a:avLst>
+              <a:gd name="adj" fmla="val 50000"/>
+            </a:avLst>
+          </a:prstGeom>
+          <a:solidFill>
+            <a:srgbClr val="D8A879"/>
+          </a:solidFill>
+          <a:ln>
+            <a:noFill/>
+          </a:ln>
+        </p:spPr>
+        <p:txBody>
+          <a:bodyPr rtlCol="0" anchor="ctr"/>
+          <a:lstStyle/>
+          <a:p>
+            <a:pPr algn="ctr"/>
+          </a:p>
+        </p:txBody>
+      </p:sp>
+      <p:sp>
+        <p:nvSpPr>
+          <p:cNvPr id="4" name="상단 라벨"/>
+          <p:cNvSpPr txBox="1"/>
+          <p:nvPr/>
+        </p:nvSpPr>
+        <p:spPr>
+          <a:xfrm>
+            <a:off x="868680" y="274320"/>
+            <a:ext cx="5486400" cy="274320"/>
           </a:xfrm>
           <a:prstGeom prst="rect">
             <a:avLst/>
           </a:prstGeom>
+          <a:noFill/>
+        </p:spPr>
+        <p:txBody>
+          <a:bodyPr wrap="square" lIns="54864" rIns="54864" tIns="27432" bIns="27432" anchor="ctr">
+            <a:noAutofit/>
+          </a:bodyPr>
+          <a:lstStyle/>
+          <a:p>
+            <a:pPr algn="l">
+              <a:lnSpc>
+                <a:spcPct val="115000"/>
+              </a:lnSpc>
+            </a:pPr>
+            <a:r>
+              <a:rPr sz="900" b="1" i="0" spc="250">
+                <a:solidFill>
+                  <a:srgbClr val="8E8780"/>
+                </a:solidFill>
+              </a:rPr>
+              <a:t>FAMILY ALBUM</a:t>
+            </a:r>
+          </a:p>
+        </p:txBody>
+      </p:sp>
+      <p:sp>
+        <p:nvSpPr>
+          <p:cNvPr id="5" name="포인트"/>
+          <p:cNvSpPr/>
+          <p:nvPr/>
+        </p:nvSpPr>
+        <p:spPr>
+          <a:xfrm>
+            <a:off x="11167567" y="667512"/>
+            <a:ext cx="310896" cy="310896"/>
+          </a:xfrm>
+          <a:prstGeom prst="sun">
+            <a:avLst/>
+          </a:prstGeom>
           <a:solidFill>
-            <a:srgbClr val="FFFFFF"/>
+            <a:srgbClr val="EBCCAD"/>
           </a:solidFill>
-          <a:ln w="25400">
-            <a:solidFill>
-              <a:srgbClr val="7B5732"/>
-            </a:solidFill>
-            <a:prstDash val="dash"/>
+          <a:ln>
+            <a:noFill/>
           </a:ln>
         </p:spPr>
         <p:txBody>
@@ -5310,8 +5659,8 @@
         </p:nvSpPr>
         <p:spPr>
           <a:xfrm>
-            <a:off x="777240" y="548640"/>
-            <a:ext cx="9357055" cy="822960"/>
+            <a:off x="868680" y="566928"/>
+            <a:ext cx="9448495" cy="868680"/>
           </a:xfrm>
         </p:spPr>
         <p:txBody>
@@ -5328,7 +5677,7 @@
             <a:r>
               <a:rPr sz="3000" b="1" i="0">
                 <a:solidFill>
-                  <a:srgbClr val="3A2918"/>
+                  <a:srgbClr val="26231F"/>
                 </a:solidFill>
               </a:rPr>
               <a:t>가족 사진</a:t>
@@ -5338,14 +5687,14 @@
       </p:sp>
       <p:sp>
         <p:nvSpPr>
-          <p:cNvPr id="4" name="사진 자리"/>
+          <p:cNvPr id="6" name="사진 자리"/>
           <p:cNvSpPr/>
           <p:nvPr/>
         </p:nvSpPr>
         <p:spPr>
           <a:xfrm>
-            <a:off x="777240" y="1554480"/>
-            <a:ext cx="3423818" cy="2240279"/>
+            <a:off x="640080" y="1783080"/>
+            <a:ext cx="3515258" cy="2194560"/>
           </a:xfrm>
           <a:prstGeom prst="roundRect">
             <a:avLst>
@@ -5353,12 +5702,10 @@
             </a:avLst>
           </a:prstGeom>
           <a:solidFill>
-            <a:srgbClr val="EFE0D2"/>
+            <a:srgbClr val="F6E6D5"/>
           </a:solidFill>
           <a:ln w="19050">
-            <a:solidFill>
-              <a:srgbClr val="7B5732"/>
-            </a:solidFill>
+            <a:noFill/>
             <a:prstDash val="dash"/>
           </a:ln>
         </p:spPr>
@@ -5376,7 +5723,7 @@
             <a:r>
               <a:rPr sz="1200" b="0" i="0">
                 <a:solidFill>
-                  <a:srgbClr val="3A2918"/>
+                  <a:srgbClr val="8E8780"/>
                 </a:solidFill>
               </a:rPr>
               <a:t>사진 1</a:t>
@@ -5386,14 +5733,14 @@
       </p:sp>
       <p:sp>
         <p:nvSpPr>
-          <p:cNvPr id="5" name="사진 자리"/>
+          <p:cNvPr id="7" name="사진 자리"/>
           <p:cNvSpPr/>
           <p:nvPr/>
         </p:nvSpPr>
         <p:spPr>
           <a:xfrm>
-            <a:off x="4383938" y="1554480"/>
-            <a:ext cx="3423818" cy="2240279"/>
+            <a:off x="4338218" y="1783080"/>
+            <a:ext cx="3515258" cy="2194560"/>
           </a:xfrm>
           <a:prstGeom prst="roundRect">
             <a:avLst>
@@ -5401,12 +5748,10 @@
             </a:avLst>
           </a:prstGeom>
           <a:solidFill>
-            <a:srgbClr val="EFE0D2"/>
+            <a:srgbClr val="F6E6D5"/>
           </a:solidFill>
           <a:ln w="19050">
-            <a:solidFill>
-              <a:srgbClr val="7B5732"/>
-            </a:solidFill>
+            <a:noFill/>
             <a:prstDash val="dash"/>
           </a:ln>
         </p:spPr>
@@ -5424,7 +5769,7 @@
             <a:r>
               <a:rPr sz="1200" b="0" i="0">
                 <a:solidFill>
-                  <a:srgbClr val="3A2918"/>
+                  <a:srgbClr val="8E8780"/>
                 </a:solidFill>
               </a:rPr>
               <a:t>사진 2</a:t>
@@ -5434,14 +5779,14 @@
       </p:sp>
       <p:sp>
         <p:nvSpPr>
-          <p:cNvPr id="6" name="사진 자리"/>
+          <p:cNvPr id="8" name="사진 자리"/>
           <p:cNvSpPr/>
           <p:nvPr/>
         </p:nvSpPr>
         <p:spPr>
           <a:xfrm>
-            <a:off x="7990636" y="1554480"/>
-            <a:ext cx="3423818" cy="2240279"/>
+            <a:off x="8036356" y="1783080"/>
+            <a:ext cx="3515258" cy="2194560"/>
           </a:xfrm>
           <a:prstGeom prst="roundRect">
             <a:avLst>
@@ -5449,12 +5794,10 @@
             </a:avLst>
           </a:prstGeom>
           <a:solidFill>
-            <a:srgbClr val="EFE0D2"/>
+            <a:srgbClr val="F6E6D5"/>
           </a:solidFill>
           <a:ln w="19050">
-            <a:solidFill>
-              <a:srgbClr val="7B5732"/>
-            </a:solidFill>
+            <a:noFill/>
             <a:prstDash val="dash"/>
           </a:ln>
         </p:spPr>
@@ -5472,7 +5815,7 @@
             <a:r>
               <a:rPr sz="1200" b="0" i="0">
                 <a:solidFill>
-                  <a:srgbClr val="3A2918"/>
+                  <a:srgbClr val="8E8780"/>
                 </a:solidFill>
               </a:rPr>
               <a:t>사진 3</a:t>
@@ -5482,14 +5825,14 @@
       </p:sp>
       <p:sp>
         <p:nvSpPr>
-          <p:cNvPr id="7" name="사진 자리"/>
+          <p:cNvPr id="9" name="사진 자리"/>
           <p:cNvSpPr/>
           <p:nvPr/>
         </p:nvSpPr>
         <p:spPr>
           <a:xfrm>
-            <a:off x="777240" y="3977639"/>
-            <a:ext cx="3423818" cy="2240279"/>
+            <a:off x="640080" y="4160520"/>
+            <a:ext cx="3515258" cy="2194560"/>
           </a:xfrm>
           <a:prstGeom prst="roundRect">
             <a:avLst>
@@ -5497,12 +5840,10 @@
             </a:avLst>
           </a:prstGeom>
           <a:solidFill>
-            <a:srgbClr val="EFE0D2"/>
+            <a:srgbClr val="F6E6D5"/>
           </a:solidFill>
           <a:ln w="19050">
-            <a:solidFill>
-              <a:srgbClr val="7B5732"/>
-            </a:solidFill>
+            <a:noFill/>
             <a:prstDash val="dash"/>
           </a:ln>
         </p:spPr>
@@ -5520,7 +5861,7 @@
             <a:r>
               <a:rPr sz="1200" b="0" i="0">
                 <a:solidFill>
-                  <a:srgbClr val="3A2918"/>
+                  <a:srgbClr val="8E8780"/>
                 </a:solidFill>
               </a:rPr>
               <a:t>사진 4</a:t>
@@ -5530,14 +5871,14 @@
       </p:sp>
       <p:sp>
         <p:nvSpPr>
-          <p:cNvPr id="8" name="사진 자리"/>
+          <p:cNvPr id="10" name="사진 자리"/>
           <p:cNvSpPr/>
           <p:nvPr/>
         </p:nvSpPr>
         <p:spPr>
           <a:xfrm>
-            <a:off x="4383938" y="3977639"/>
-            <a:ext cx="3423818" cy="2240279"/>
+            <a:off x="4338218" y="4160520"/>
+            <a:ext cx="3515258" cy="2194560"/>
           </a:xfrm>
           <a:prstGeom prst="roundRect">
             <a:avLst>
@@ -5545,12 +5886,10 @@
             </a:avLst>
           </a:prstGeom>
           <a:solidFill>
-            <a:srgbClr val="EFE0D2"/>
+            <a:srgbClr val="F6E6D5"/>
           </a:solidFill>
           <a:ln w="19050">
-            <a:solidFill>
-              <a:srgbClr val="7B5732"/>
-            </a:solidFill>
+            <a:noFill/>
             <a:prstDash val="dash"/>
           </a:ln>
         </p:spPr>
@@ -5568,7 +5907,7 @@
             <a:r>
               <a:rPr sz="1200" b="0" i="0">
                 <a:solidFill>
-                  <a:srgbClr val="3A2918"/>
+                  <a:srgbClr val="8E8780"/>
                 </a:solidFill>
               </a:rPr>
               <a:t>사진 5</a:t>
@@ -5578,14 +5917,14 @@
       </p:sp>
       <p:sp>
         <p:nvSpPr>
-          <p:cNvPr id="9" name="사진 자리"/>
+          <p:cNvPr id="11" name="사진 자리"/>
           <p:cNvSpPr/>
           <p:nvPr/>
         </p:nvSpPr>
         <p:spPr>
           <a:xfrm>
-            <a:off x="7990636" y="3977639"/>
-            <a:ext cx="3423818" cy="2240279"/>
+            <a:off x="8036356" y="4160520"/>
+            <a:ext cx="3515258" cy="2194560"/>
           </a:xfrm>
           <a:prstGeom prst="roundRect">
             <a:avLst>
@@ -5593,12 +5932,10 @@
             </a:avLst>
           </a:prstGeom>
           <a:solidFill>
-            <a:srgbClr val="EFE0D2"/>
+            <a:srgbClr val="F6E6D5"/>
           </a:solidFill>
           <a:ln w="19050">
-            <a:solidFill>
-              <a:srgbClr val="7B5732"/>
-            </a:solidFill>
+            <a:noFill/>
             <a:prstDash val="dash"/>
           </a:ln>
         </p:spPr>
@@ -5616,7 +5953,7 @@
             <a:r>
               <a:rPr sz="1200" b="0" i="0">
                 <a:solidFill>
-                  <a:srgbClr val="3A2918"/>
+                  <a:srgbClr val="8E8780"/>
                 </a:solidFill>
               </a:rPr>
               <a:t>사진 6</a:t>
@@ -5635,6 +5972,14 @@
 <file path=ppt/slides/slide6.xml><?xml version="1.0" encoding="utf-8"?>
 <p:sld xmlns:a="http://schemas.openxmlformats.org/drawingml/2006/main" xmlns:p="http://schemas.openxmlformats.org/presentationml/2006/main" xmlns:r="http://schemas.openxmlformats.org/officeDocument/2006/relationships">
   <p:cSld>
+    <p:bg>
+      <p:bgPr>
+        <a:solidFill>
+          <a:srgbClr val="FBF4EC"/>
+        </a:solidFill>
+        <a:effectLst/>
+      </p:bgPr>
+    </p:bg>
     <p:spTree>
       <p:nvGrpSpPr>
         <p:cNvPr id="1" name=""/>
@@ -5642,30 +5987,119 @@
         <p:nvPr/>
       </p:nvGrpSpPr>
       <p:grpSpPr/>
-      <p:pic>
-        <p:nvPicPr>
-          <p:cNvPr id="3" name="표지 그림" descr="family-35.jpg"/>
-          <p:cNvPicPr>
-            <a:picLocks noChangeAspect="1"/>
-          </p:cNvPicPr>
+      <p:sp>
+        <p:nvSpPr>
+          <p:cNvPr id="3" name="사진 자리"/>
+          <p:cNvSpPr/>
           <p:nvPr/>
-        </p:nvPicPr>
-        <p:blipFill>
-          <a:blip r:embed="rId2"/>
-          <a:stretch>
-            <a:fillRect/>
-          </a:stretch>
-        </p:blipFill>
-        <p:spPr>
-          <a:xfrm>
-            <a:off x="0" y="0"/>
-            <a:ext cx="12191695" cy="6858000"/>
+        </p:nvSpPr>
+        <p:spPr>
+          <a:xfrm>
+            <a:off x="7558851" y="685800"/>
+            <a:ext cx="3169840" cy="5486400"/>
+          </a:xfrm>
+          <a:prstGeom prst="round2SameRect">
+            <a:avLst>
+              <a:gd name="adj1" fmla="val 50000"/>
+              <a:gd name="adj2" fmla="val 0"/>
+            </a:avLst>
+          </a:prstGeom>
+          <a:solidFill>
+            <a:srgbClr val="EBCCAD"/>
+          </a:solidFill>
+          <a:ln>
+            <a:noFill/>
+          </a:ln>
+        </p:spPr>
+        <p:txBody>
+          <a:bodyPr rtlCol="0" anchor="ctr" wrap="square" lIns="54864" rIns="54864" tIns="27432" bIns="27432">
+            <a:noAutofit/>
+          </a:bodyPr>
+          <a:lstStyle/>
+          <a:p>
+            <a:pPr algn="ctr">
+              <a:lnSpc>
+                <a:spcPct val="100000"/>
+              </a:lnSpc>
+            </a:pPr>
+            <a:r>
+              <a:rPr sz="1400" b="0" i="0">
+                <a:solidFill>
+                  <a:srgbClr val="493827"/>
+                </a:solidFill>
+              </a:rPr>
+              <a:t>사진을 넣어 주세요</a:t>
+            </a:r>
+          </a:p>
+        </p:txBody>
+      </p:sp>
+      <p:sp>
+        <p:nvSpPr>
+          <p:cNvPr id="4" name="장식"/>
+          <p:cNvSpPr/>
+          <p:nvPr/>
+        </p:nvSpPr>
+        <p:spPr>
+          <a:xfrm>
+            <a:off x="6827349" y="4251960"/>
+            <a:ext cx="1005840" cy="1005840"/>
+          </a:xfrm>
+          <a:prstGeom prst="ellipse">
+            <a:avLst/>
+          </a:prstGeom>
+          <a:solidFill>
+            <a:srgbClr val="EBCCAD"/>
+          </a:solidFill>
+          <a:ln>
+            <a:noFill/>
+          </a:ln>
+        </p:spPr>
+        <p:txBody>
+          <a:bodyPr rtlCol="0" anchor="ctr"/>
+          <a:lstStyle/>
+          <a:p>
+            <a:pPr algn="ctr"/>
+          </a:p>
+        </p:txBody>
+      </p:sp>
+      <p:sp>
+        <p:nvSpPr>
+          <p:cNvPr id="5" name="라벨"/>
+          <p:cNvSpPr txBox="1"/>
+          <p:nvPr/>
+        </p:nvSpPr>
+        <p:spPr>
+          <a:xfrm>
+            <a:off x="822960" y="2148840"/>
+            <a:ext cx="5608179" cy="274320"/>
           </a:xfrm>
           <a:prstGeom prst="rect">
             <a:avLst/>
           </a:prstGeom>
-        </p:spPr>
-      </p:pic>
+          <a:noFill/>
+        </p:spPr>
+        <p:txBody>
+          <a:bodyPr wrap="square" lIns="54864" rIns="54864" tIns="27432" bIns="27432" anchor="t">
+            <a:noAutofit/>
+          </a:bodyPr>
+          <a:lstStyle/>
+          <a:p>
+            <a:pPr algn="l">
+              <a:lnSpc>
+                <a:spcPct val="115000"/>
+              </a:lnSpc>
+            </a:pPr>
+            <a:r>
+              <a:rPr sz="1000" b="1" i="0" spc="250">
+                <a:solidFill>
+                  <a:srgbClr val="26231F"/>
+                </a:solidFill>
+              </a:rPr>
+              <a:t>FAMILY ALBUM</a:t>
+            </a:r>
+          </a:p>
+        </p:txBody>
+      </p:sp>
       <p:sp>
         <p:nvSpPr>
           <p:cNvPr id="2" name="Title 1"/>
@@ -5678,8 +6112,8 @@
         </p:nvSpPr>
         <p:spPr>
           <a:xfrm>
-            <a:off x="853418" y="2057400"/>
-            <a:ext cx="6095847" cy="1554480"/>
+            <a:off x="822960" y="2606040"/>
+            <a:ext cx="5608179" cy="1188720"/>
           </a:xfrm>
         </p:spPr>
         <p:txBody>
@@ -5694,9 +6128,9 @@
               </a:lnSpc>
             </a:pPr>
             <a:r>
-              <a:rPr sz="3600" b="1" i="0">
-                <a:solidFill>
-                  <a:srgbClr val="3A2918"/>
+              <a:rPr sz="4000" b="1" i="0">
+                <a:solidFill>
+                  <a:srgbClr val="26231F"/>
                 </a:solidFill>
               </a:rPr>
               <a:t>우리 가족 소개를 마칩니다</a:t>
@@ -5706,14 +6140,14 @@
       </p:sp>
       <p:sp>
         <p:nvSpPr>
-          <p:cNvPr id="4" name="한 줄 문구"/>
+          <p:cNvPr id="6" name="한 줄 문구"/>
           <p:cNvSpPr txBox="1"/>
           <p:nvPr/>
         </p:nvSpPr>
         <p:spPr>
           <a:xfrm>
-            <a:off x="853418" y="3749039"/>
-            <a:ext cx="6095847" cy="822960"/>
+            <a:off x="822960" y="3886200"/>
+            <a:ext cx="5608179" cy="822960"/>
           </a:xfrm>
           <a:prstGeom prst="rect">
             <a:avLst/>
@@ -5732,9 +6166,9 @@
               </a:lnSpc>
             </a:pPr>
             <a:r>
-              <a:rPr sz="1700" b="0" i="1">
-                <a:solidFill>
-                  <a:srgbClr val="3A2918"/>
+              <a:rPr sz="1700" b="0" i="0">
+                <a:solidFill>
+                  <a:srgbClr val="26231F"/>
                 </a:solidFill>
               </a:rPr>
               <a:t>읽어 주셔서 고맙습니다</a:t>
@@ -5744,14 +6178,14 @@
       </p:sp>
       <p:sp>
         <p:nvSpPr>
-          <p:cNvPr id="5" name="안내 문구"/>
+          <p:cNvPr id="7" name="안내 문구"/>
           <p:cNvSpPr txBox="1"/>
           <p:nvPr/>
         </p:nvSpPr>
         <p:spPr>
           <a:xfrm>
-            <a:off x="853418" y="4617720"/>
-            <a:ext cx="6095847" cy="914400"/>
+            <a:off x="822960" y="4754880"/>
+            <a:ext cx="5608179" cy="914400"/>
           </a:xfrm>
           <a:prstGeom prst="rect">
             <a:avLst/>
@@ -5772,7 +6206,7 @@
             <a:r>
               <a:rPr sz="1400" b="0" i="0">
                 <a:solidFill>
-                  <a:srgbClr val="666666"/>
+                  <a:srgbClr val="26231F"/>
                 </a:solidFill>
               </a:rPr>
               <a:t>고맙습니다 · 가족 이름</a:t>
@@ -5799,34 +6233,34 @@
         <a:sysClr val="window" lastClr="FFFFFF"/>
       </a:lt1>
       <a:dk2>
-        <a:srgbClr val="3A2918"/>
+        <a:srgbClr val="493827"/>
       </a:dk2>
       <a:lt2>
-        <a:srgbClr val="F9F5F1"/>
+        <a:srgbClr val="FBF4EC"/>
       </a:lt2>
       <a:accent1>
-        <a:srgbClr val="7B5732"/>
+        <a:srgbClr val="D8A879"/>
       </a:accent1>
       <a:accent2>
-        <a:srgbClr val="3B9191"/>
+        <a:srgbClr val="E1DF98"/>
       </a:accent2>
       <a:accent3>
-        <a:srgbClr val="3A2918"/>
+        <a:srgbClr val="493827"/>
       </a:accent3>
       <a:accent4>
-        <a:srgbClr val="EFE0D2"/>
+        <a:srgbClr val="F6E6D5"/>
       </a:accent4>
       <a:accent5>
-        <a:srgbClr val="5B7462"/>
+        <a:srgbClr val="DCC488"/>
       </a:accent5>
       <a:accent6>
-        <a:srgbClr val="897F74"/>
+        <a:srgbClr val="92887D"/>
       </a:accent6>
       <a:hlink>
-        <a:srgbClr val="7B5732"/>
+        <a:srgbClr val="D8A879"/>
       </a:hlink>
       <a:folHlink>
-        <a:srgbClr val="3A2918"/>
+        <a:srgbClr val="493827"/>
       </a:folHlink>
     </a:clrScheme>
     <a:fontScheme name="Office">
